--- a/templates/销售分析报告_标准模板.pptx
+++ b/templates/销售分析报告_标准模板.pptx
@@ -18,6 +18,7 @@
     <p:sldId id="266" r:id="rId12"/>
     <p:sldId id="267" r:id="rId13"/>
     <p:sldId id="268" r:id="rId14"/>
+    <p:sldId id="269" r:id="rId15"/>
   </p:sldIdLst>
   <p:sldSz cx="12192000" cy="6858000"/>
   <p:notesSz cx="6858000" cy="9144000"/>
@@ -314,7 +315,7 @@
           <a:p>
             <a:fld id="{5BCAD085-E8A6-8845-BD4E-CB4CCA059FC4}" type="datetimeFigureOut">
               <a:rPr lang="en-US" smtClean="0"/>
-              <a:t>4/7/2026</a:t>
+              <a:t>4/8/2026</a:t>
             </a:fld>
             <a:endParaRPr lang="en-US"/>
           </a:p>
@@ -482,7 +483,7 @@
           <a:p>
             <a:fld id="{5BCAD085-E8A6-8845-BD4E-CB4CCA059FC4}" type="datetimeFigureOut">
               <a:rPr lang="en-US" smtClean="0"/>
-              <a:t>4/7/2026</a:t>
+              <a:t>4/8/2026</a:t>
             </a:fld>
             <a:endParaRPr lang="en-US"/>
           </a:p>
@@ -660,7 +661,7 @@
           <a:p>
             <a:fld id="{5BCAD085-E8A6-8845-BD4E-CB4CCA059FC4}" type="datetimeFigureOut">
               <a:rPr lang="en-US" smtClean="0"/>
-              <a:t>4/7/2026</a:t>
+              <a:t>4/8/2026</a:t>
             </a:fld>
             <a:endParaRPr lang="en-US"/>
           </a:p>
@@ -828,7 +829,7 @@
           <a:p>
             <a:fld id="{5BCAD085-E8A6-8845-BD4E-CB4CCA059FC4}" type="datetimeFigureOut">
               <a:rPr lang="en-US" smtClean="0"/>
-              <a:t>4/7/2026</a:t>
+              <a:t>4/8/2026</a:t>
             </a:fld>
             <a:endParaRPr lang="en-US"/>
           </a:p>
@@ -1073,7 +1074,7 @@
           <a:p>
             <a:fld id="{5BCAD085-E8A6-8845-BD4E-CB4CCA059FC4}" type="datetimeFigureOut">
               <a:rPr lang="en-US" smtClean="0"/>
-              <a:t>4/7/2026</a:t>
+              <a:t>4/8/2026</a:t>
             </a:fld>
             <a:endParaRPr lang="en-US"/>
           </a:p>
@@ -1358,7 +1359,7 @@
           <a:p>
             <a:fld id="{5BCAD085-E8A6-8845-BD4E-CB4CCA059FC4}" type="datetimeFigureOut">
               <a:rPr lang="en-US" smtClean="0"/>
-              <a:t>4/7/2026</a:t>
+              <a:t>4/8/2026</a:t>
             </a:fld>
             <a:endParaRPr lang="en-US"/>
           </a:p>
@@ -1777,7 +1778,7 @@
           <a:p>
             <a:fld id="{5BCAD085-E8A6-8845-BD4E-CB4CCA059FC4}" type="datetimeFigureOut">
               <a:rPr lang="en-US" smtClean="0"/>
-              <a:t>4/7/2026</a:t>
+              <a:t>4/8/2026</a:t>
             </a:fld>
             <a:endParaRPr lang="en-US"/>
           </a:p>
@@ -1894,7 +1895,7 @@
           <a:p>
             <a:fld id="{5BCAD085-E8A6-8845-BD4E-CB4CCA059FC4}" type="datetimeFigureOut">
               <a:rPr lang="en-US" smtClean="0"/>
-              <a:t>4/7/2026</a:t>
+              <a:t>4/8/2026</a:t>
             </a:fld>
             <a:endParaRPr lang="en-US"/>
           </a:p>
@@ -1989,7 +1990,7 @@
           <a:p>
             <a:fld id="{5BCAD085-E8A6-8845-BD4E-CB4CCA059FC4}" type="datetimeFigureOut">
               <a:rPr lang="en-US" smtClean="0"/>
-              <a:t>4/7/2026</a:t>
+              <a:t>4/8/2026</a:t>
             </a:fld>
             <a:endParaRPr lang="en-US"/>
           </a:p>
@@ -2264,7 +2265,7 @@
           <a:p>
             <a:fld id="{5BCAD085-E8A6-8845-BD4E-CB4CCA059FC4}" type="datetimeFigureOut">
               <a:rPr lang="en-US" smtClean="0"/>
-              <a:t>4/7/2026</a:t>
+              <a:t>4/8/2026</a:t>
             </a:fld>
             <a:endParaRPr lang="en-US"/>
           </a:p>
@@ -2516,7 +2517,7 @@
           <a:p>
             <a:fld id="{5BCAD085-E8A6-8845-BD4E-CB4CCA059FC4}" type="datetimeFigureOut">
               <a:rPr lang="en-US" smtClean="0"/>
-              <a:t>4/7/2026</a:t>
+              <a:t>4/8/2026</a:t>
             </a:fld>
             <a:endParaRPr lang="en-US"/>
           </a:p>
@@ -2727,7 +2728,7 @@
           <a:p>
             <a:fld id="{5BCAD085-E8A6-8845-BD4E-CB4CCA059FC4}" type="datetimeFigureOut">
               <a:rPr lang="en-US" smtClean="0"/>
-              <a:t>4/7/2026</a:t>
+              <a:t>4/8/2026</a:t>
             </a:fld>
             <a:endParaRPr lang="en-US"/>
           </a:p>
@@ -3655,6 +3656,128 @@
         </p:txBody>
       </p:sp>
     </p:spTree>
+  </p:cSld>
+  <p:clrMapOvr>
+    <a:masterClrMapping/>
+  </p:clrMapOvr>
+</p:sld>
+</file>
+
+<file path=ppt/slides/slide14.xml><?xml version="1.0" encoding="utf-8"?>
+<p:sld xmlns:a="http://schemas.openxmlformats.org/drawingml/2006/main" xmlns:r="http://schemas.openxmlformats.org/officeDocument/2006/relationships" xmlns:p="http://schemas.openxmlformats.org/presentationml/2006/main">
+  <p:cSld>
+    <p:spTree>
+      <p:nvGrpSpPr>
+        <p:cNvPr id="1" name=""/>
+        <p:cNvGrpSpPr/>
+        <p:nvPr/>
+      </p:nvGrpSpPr>
+      <p:grpSpPr>
+        <a:xfrm>
+          <a:off x="0" y="0"/>
+          <a:ext cx="0" cy="0"/>
+          <a:chOff x="0" y="0"/>
+          <a:chExt cx="0" cy="0"/>
+        </a:xfrm>
+      </p:grpSpPr>
+      <p:sp>
+        <p:nvSpPr>
+          <p:cNvPr id="5" name="文本框 4">
+            <a:extLst>
+              <a:ext uri="{FF2B5EF4-FFF2-40B4-BE49-F238E27FC236}">
+                <a16:creationId xmlns:a16="http://schemas.microsoft.com/office/drawing/2014/main" id="{6EDA7A49-F1AA-5E02-8E84-186665F143DC}"/>
+              </a:ext>
+            </a:extLst>
+          </p:cNvPr>
+          <p:cNvSpPr txBox="1"/>
+          <p:nvPr/>
+        </p:nvSpPr>
+        <p:spPr>
+          <a:xfrm>
+            <a:off x="2068436" y="3058510"/>
+            <a:ext cx="2989142" cy="369332"/>
+          </a:xfrm>
+          <a:prstGeom prst="rect">
+            <a:avLst/>
+          </a:prstGeom>
+          <a:noFill/>
+        </p:spPr>
+        <p:txBody>
+          <a:bodyPr wrap="square" rtlCol="0">
+            <a:spAutoFit/>
+          </a:bodyPr>
+          <a:lstStyle/>
+          <a:p>
+            <a:endParaRPr lang="zh-CN" altLang="en-US" dirty="0"/>
+          </a:p>
+        </p:txBody>
+      </p:sp>
+      <p:sp>
+        <p:nvSpPr>
+          <p:cNvPr id="2" name="矩形 1">
+            <a:extLst>
+              <a:ext uri="{FF2B5EF4-FFF2-40B4-BE49-F238E27FC236}">
+                <a16:creationId xmlns:a16="http://schemas.microsoft.com/office/drawing/2014/main" id="{BE425793-6A16-ECF1-4B70-F2855E9017EA}"/>
+              </a:ext>
+            </a:extLst>
+          </p:cNvPr>
+          <p:cNvSpPr/>
+          <p:nvPr/>
+        </p:nvSpPr>
+        <p:spPr>
+          <a:xfrm>
+            <a:off x="5240458" y="1513490"/>
+            <a:ext cx="6180083" cy="4181015"/>
+          </a:xfrm>
+          <a:prstGeom prst="rect">
+            <a:avLst/>
+          </a:prstGeom>
+        </p:spPr>
+        <p:style>
+          <a:lnRef idx="1">
+            <a:schemeClr val="accent1"/>
+          </a:lnRef>
+          <a:fillRef idx="3">
+            <a:schemeClr val="accent1"/>
+          </a:fillRef>
+          <a:effectRef idx="2">
+            <a:schemeClr val="accent1"/>
+          </a:effectRef>
+          <a:fontRef idx="minor">
+            <a:schemeClr val="lt1"/>
+          </a:fontRef>
+        </p:style>
+        <p:txBody>
+          <a:bodyPr rtlCol="0" anchor="ctr"/>
+          <a:lstStyle/>
+          <a:p>
+            <a:pPr algn="ctr"/>
+            <a:r>
+              <a:rPr lang="en-US" altLang="zh-CN" dirty="0"/>
+              <a:t>[</a:t>
+            </a:r>
+            <a:r>
+              <a:rPr lang="en-US" altLang="zh-CN" dirty="0" err="1"/>
+              <a:t>CHART:customer_city</a:t>
+            </a:r>
+            <a:r>
+              <a:rPr lang="en-US" altLang="zh-CN" dirty="0"/>
+              <a:t>]</a:t>
+            </a:r>
+            <a:endParaRPr lang="zh-CN" altLang="en-US" dirty="0"/>
+          </a:p>
+          <a:p>
+            <a:pPr algn="ctr"/>
+            <a:endParaRPr lang="zh-CN" altLang="en-US" dirty="0"/>
+          </a:p>
+        </p:txBody>
+      </p:sp>
+    </p:spTree>
+    <p:extLst>
+      <p:ext uri="{BB962C8B-B14F-4D97-AF65-F5344CB8AC3E}">
+        <p14:creationId xmlns:p14="http://schemas.microsoft.com/office/powerpoint/2010/main" val="68283920"/>
+      </p:ext>
+    </p:extLst>
   </p:cSld>
   <p:clrMapOvr>
     <a:masterClrMapping/>

--- a/templates/销售分析报告_标准模板.pptx
+++ b/templates/销售分析报告_标准模板.pptx
@@ -3772,6 +3772,124 @@
           </a:p>
         </p:txBody>
       </p:sp>
+      <p:sp>
+        <p:nvSpPr>
+          <p:cNvPr id="3" name="文本框 2">
+            <a:extLst>
+              <a:ext uri="{FF2B5EF4-FFF2-40B4-BE49-F238E27FC236}">
+                <a16:creationId xmlns:a16="http://schemas.microsoft.com/office/drawing/2014/main" id="{29A9A806-473D-37B7-BE4F-455A7EF285BA}"/>
+              </a:ext>
+            </a:extLst>
+          </p:cNvPr>
+          <p:cNvSpPr txBox="1"/>
+          <p:nvPr/>
+        </p:nvSpPr>
+        <p:spPr>
+          <a:xfrm>
+            <a:off x="1705855" y="3672968"/>
+            <a:ext cx="184731" cy="369332"/>
+          </a:xfrm>
+          <a:prstGeom prst="rect">
+            <a:avLst/>
+          </a:prstGeom>
+          <a:noFill/>
+        </p:spPr>
+        <p:txBody>
+          <a:bodyPr wrap="none" rtlCol="0">
+            <a:spAutoFit/>
+          </a:bodyPr>
+          <a:lstStyle/>
+          <a:p>
+            <a:endParaRPr lang="zh-CN" altLang="en-US" dirty="0"/>
+          </a:p>
+        </p:txBody>
+      </p:sp>
+      <p:graphicFrame>
+        <p:nvGraphicFramePr>
+          <p:cNvPr id="4" name="表格 3">
+            <a:extLst>
+              <a:ext uri="{FF2B5EF4-FFF2-40B4-BE49-F238E27FC236}">
+                <a16:creationId xmlns:a16="http://schemas.microsoft.com/office/drawing/2014/main" id="{E12609E2-21A8-EA49-5410-6F3BD7BCE3B9}"/>
+              </a:ext>
+            </a:extLst>
+          </p:cNvPr>
+          <p:cNvGraphicFramePr>
+            <a:graphicFrameLocks noGrp="1"/>
+          </p:cNvGraphicFramePr>
+          <p:nvPr>
+            <p:extLst>
+              <p:ext uri="{D42A27DB-BD31-4B8C-83A1-F6EECF244321}">
+                <p14:modId xmlns:p14="http://schemas.microsoft.com/office/powerpoint/2010/main" val="1065494781"/>
+              </p:ext>
+            </p:extLst>
+          </p:nvPr>
+        </p:nvGraphicFramePr>
+        <p:xfrm>
+          <a:off x="389964" y="1681819"/>
+          <a:ext cx="2631782" cy="365760"/>
+        </p:xfrm>
+        <a:graphic>
+          <a:graphicData uri="http://schemas.openxmlformats.org/drawingml/2006/table">
+            <a:tbl>
+              <a:tblPr/>
+              <a:tblGrid>
+                <a:gridCol w="2631782">
+                  <a:extLst>
+                    <a:ext uri="{9D8B030D-6E8A-4147-A177-3AD203B41FA5}">
+                      <a16:colId xmlns:a16="http://schemas.microsoft.com/office/drawing/2014/main" val="3595657301"/>
+                    </a:ext>
+                  </a:extLst>
+                </a:gridCol>
+              </a:tblGrid>
+              <a:tr h="0">
+                <a:tc>
+                  <a:txBody>
+                    <a:bodyPr/>
+                    <a:lstStyle/>
+                    <a:p>
+                      <a:pPr>
+                        <a:buNone/>
+                      </a:pPr>
+                      <a:r>
+                        <a:rPr lang="en-US" dirty="0"/>
+                        <a:t>{{</a:t>
+                      </a:r>
+                      <a:r>
+                        <a:rPr lang="en-US" dirty="0" err="1"/>
+                        <a:t>INSIGHT:customer_city</a:t>
+                      </a:r>
+                      <a:r>
+                        <a:rPr lang="en-US" dirty="0"/>
+                        <a:t>}}</a:t>
+                      </a:r>
+                    </a:p>
+                  </a:txBody>
+                  <a:tcPr anchor="ctr">
+                    <a:lnL>
+                      <a:noFill/>
+                    </a:lnL>
+                    <a:lnR>
+                      <a:noFill/>
+                    </a:lnR>
+                    <a:lnT>
+                      <a:noFill/>
+                    </a:lnT>
+                    <a:lnB>
+                      <a:noFill/>
+                    </a:lnB>
+                    <a:noFill/>
+                  </a:tcPr>
+                </a:tc>
+                <a:extLst>
+                  <a:ext uri="{0D108BD9-81ED-4DB2-BD59-A6C34878D82A}">
+                    <a16:rowId xmlns:a16="http://schemas.microsoft.com/office/drawing/2014/main" val="1495118108"/>
+                  </a:ext>
+                </a:extLst>
+              </a:tr>
+            </a:tbl>
+          </a:graphicData>
+        </a:graphic>
+      </p:graphicFrame>
     </p:spTree>
     <p:extLst>
       <p:ext uri="{BB962C8B-B14F-4D97-AF65-F5344CB8AC3E}">
@@ -4288,7 +4406,7 @@
         <p:spPr>
           <a:xfrm>
             <a:off x="8046720" y="1371600"/>
-            <a:ext cx="3657600" cy="4114800"/>
+            <a:ext cx="2907142" cy="369332"/>
           </a:xfrm>
           <a:prstGeom prst="rect">
             <a:avLst/>
@@ -4307,7 +4425,15 @@
             </a:r>
             <a:r>
               <a:rPr dirty="0" err="1"/>
-              <a:t>INSIGHT:sales_person</a:t>
+              <a:t>INSIGHT:</a:t>
+            </a:r>
+            <a:r>
+              <a:rPr lang="en-US" altLang="zh-CN" dirty="0" err="1"/>
+              <a:t>sales_by_person</a:t>
+            </a:r>
+            <a:r>
+              <a:rPr lang="en-US" altLang="zh-CN" dirty="0"/>
+              <a:t> </a:t>
             </a:r>
             <a:r>
               <a:rPr dirty="0"/>
@@ -4434,7 +4560,7 @@
         <p:spPr>
           <a:xfrm>
             <a:off x="5760720" y="1371600"/>
-            <a:ext cx="5943600" cy="5029200"/>
+            <a:ext cx="2437270" cy="369332"/>
           </a:xfrm>
           <a:prstGeom prst="rect">
             <a:avLst/>
@@ -4448,7 +4574,20 @@
           <a:lstStyle/>
           <a:p>
             <a:r>
-              <a:t>{{INSIGHT:product}}</a:t>
+              <a:rPr dirty="0"/>
+              <a:t>{{</a:t>
+            </a:r>
+            <a:r>
+              <a:rPr dirty="0" err="1"/>
+              <a:t>INSIGHT:</a:t>
+            </a:r>
+            <a:r>
+              <a:rPr lang="en-US" dirty="0" err="1"/>
+              <a:t>product_pie</a:t>
+            </a:r>
+            <a:r>
+              <a:rPr dirty="0"/>
+              <a:t>}}</a:t>
             </a:r>
           </a:p>
         </p:txBody>
@@ -4571,7 +4710,7 @@
         <p:spPr>
           <a:xfrm>
             <a:off x="8046720" y="1371600"/>
-            <a:ext cx="3657600" cy="4114800"/>
+            <a:ext cx="2436244" cy="369332"/>
           </a:xfrm>
           <a:prstGeom prst="rect">
             <a:avLst/>
@@ -4585,7 +4724,20 @@
           <a:lstStyle/>
           <a:p>
             <a:r>
-              <a:t>{{INSIGHT:city}}</a:t>
+              <a:rPr dirty="0"/>
+              <a:t>{{</a:t>
+            </a:r>
+            <a:r>
+              <a:rPr dirty="0" err="1"/>
+              <a:t>INSIGHT:</a:t>
+            </a:r>
+            <a:r>
+              <a:rPr lang="en-US" dirty="0" err="1"/>
+              <a:t>city_ranking</a:t>
+            </a:r>
+            <a:r>
+              <a:rPr dirty="0"/>
+              <a:t>}}</a:t>
             </a:r>
           </a:p>
         </p:txBody>
@@ -4708,7 +4860,7 @@
         <p:spPr>
           <a:xfrm>
             <a:off x="8046720" y="1371600"/>
-            <a:ext cx="3657600" cy="4114800"/>
+            <a:ext cx="3392852" cy="369332"/>
           </a:xfrm>
           <a:prstGeom prst="rect">
             <a:avLst/>
@@ -4727,7 +4879,11 @@
             </a:r>
             <a:r>
               <a:rPr dirty="0" err="1"/>
-              <a:t>INSIGHT:customer</a:t>
+              <a:t>INSIGHT:</a:t>
+            </a:r>
+            <a:r>
+              <a:rPr lang="en-US" dirty="0" err="1"/>
+              <a:t>customer_comparison</a:t>
             </a:r>
             <a:r>
               <a:rPr dirty="0"/>
@@ -4770,7 +4926,7 @@
         <p:spPr>
           <a:xfrm>
             <a:off x="457200" y="5212080"/>
-            <a:ext cx="11277295" cy="1188720"/>
+            <a:ext cx="2703561" cy="369332"/>
           </a:xfrm>
           <a:prstGeom prst="rect">
             <a:avLst/>
@@ -4789,7 +4945,11 @@
             </a:r>
             <a:r>
               <a:rPr dirty="0" err="1"/>
-              <a:t>INSIGHT:trend</a:t>
+              <a:t>INSIGHT:</a:t>
+            </a:r>
+            <a:r>
+              <a:rPr lang="en-US" dirty="0" err="1"/>
+              <a:t>monthly_trend</a:t>
             </a:r>
             <a:r>
               <a:rPr dirty="0"/>
@@ -5026,7 +5186,16 @@
           <a:lstStyle/>
           <a:p>
             <a:r>
-              <a:t>{{INSIGHT:heatmap}}</a:t>
+              <a:rPr dirty="0"/>
+              <a:t>{{</a:t>
+            </a:r>
+            <a:r>
+              <a:rPr dirty="0" err="1"/>
+              <a:t>INSIGHT:heatmap</a:t>
+            </a:r>
+            <a:r>
+              <a:rPr dirty="0"/>
+              <a:t>}}</a:t>
             </a:r>
           </a:p>
         </p:txBody>

--- a/templates/销售分析报告_标准模板.pptx
+++ b/templates/销售分析报告_标准模板.pptx
@@ -19,6 +19,7 @@
     <p:sldId id="267" r:id="rId13"/>
     <p:sldId id="268" r:id="rId14"/>
     <p:sldId id="269" r:id="rId15"/>
+    <p:sldId id="272" r:id="rId16"/>
   </p:sldIdLst>
   <p:sldSz cx="12192000" cy="6858000"/>
   <p:notesSz cx="6858000" cy="9144000"/>
@@ -315,7 +316,7 @@
           <a:p>
             <a:fld id="{5BCAD085-E8A6-8845-BD4E-CB4CCA059FC4}" type="datetimeFigureOut">
               <a:rPr lang="en-US" smtClean="0"/>
-              <a:t>4/8/2026</a:t>
+              <a:t>4/9/2026</a:t>
             </a:fld>
             <a:endParaRPr lang="en-US"/>
           </a:p>
@@ -483,7 +484,7 @@
           <a:p>
             <a:fld id="{5BCAD085-E8A6-8845-BD4E-CB4CCA059FC4}" type="datetimeFigureOut">
               <a:rPr lang="en-US" smtClean="0"/>
-              <a:t>4/8/2026</a:t>
+              <a:t>4/9/2026</a:t>
             </a:fld>
             <a:endParaRPr lang="en-US"/>
           </a:p>
@@ -661,7 +662,7 @@
           <a:p>
             <a:fld id="{5BCAD085-E8A6-8845-BD4E-CB4CCA059FC4}" type="datetimeFigureOut">
               <a:rPr lang="en-US" smtClean="0"/>
-              <a:t>4/8/2026</a:t>
+              <a:t>4/9/2026</a:t>
             </a:fld>
             <a:endParaRPr lang="en-US"/>
           </a:p>
@@ -829,7 +830,7 @@
           <a:p>
             <a:fld id="{5BCAD085-E8A6-8845-BD4E-CB4CCA059FC4}" type="datetimeFigureOut">
               <a:rPr lang="en-US" smtClean="0"/>
-              <a:t>4/8/2026</a:t>
+              <a:t>4/9/2026</a:t>
             </a:fld>
             <a:endParaRPr lang="en-US"/>
           </a:p>
@@ -1074,7 +1075,7 @@
           <a:p>
             <a:fld id="{5BCAD085-E8A6-8845-BD4E-CB4CCA059FC4}" type="datetimeFigureOut">
               <a:rPr lang="en-US" smtClean="0"/>
-              <a:t>4/8/2026</a:t>
+              <a:t>4/9/2026</a:t>
             </a:fld>
             <a:endParaRPr lang="en-US"/>
           </a:p>
@@ -1359,7 +1360,7 @@
           <a:p>
             <a:fld id="{5BCAD085-E8A6-8845-BD4E-CB4CCA059FC4}" type="datetimeFigureOut">
               <a:rPr lang="en-US" smtClean="0"/>
-              <a:t>4/8/2026</a:t>
+              <a:t>4/9/2026</a:t>
             </a:fld>
             <a:endParaRPr lang="en-US"/>
           </a:p>
@@ -1778,7 +1779,7 @@
           <a:p>
             <a:fld id="{5BCAD085-E8A6-8845-BD4E-CB4CCA059FC4}" type="datetimeFigureOut">
               <a:rPr lang="en-US" smtClean="0"/>
-              <a:t>4/8/2026</a:t>
+              <a:t>4/9/2026</a:t>
             </a:fld>
             <a:endParaRPr lang="en-US"/>
           </a:p>
@@ -1895,7 +1896,7 @@
           <a:p>
             <a:fld id="{5BCAD085-E8A6-8845-BD4E-CB4CCA059FC4}" type="datetimeFigureOut">
               <a:rPr lang="en-US" smtClean="0"/>
-              <a:t>4/8/2026</a:t>
+              <a:t>4/9/2026</a:t>
             </a:fld>
             <a:endParaRPr lang="en-US"/>
           </a:p>
@@ -1990,7 +1991,7 @@
           <a:p>
             <a:fld id="{5BCAD085-E8A6-8845-BD4E-CB4CCA059FC4}" type="datetimeFigureOut">
               <a:rPr lang="en-US" smtClean="0"/>
-              <a:t>4/8/2026</a:t>
+              <a:t>4/9/2026</a:t>
             </a:fld>
             <a:endParaRPr lang="en-US"/>
           </a:p>
@@ -2265,7 +2266,7 @@
           <a:p>
             <a:fld id="{5BCAD085-E8A6-8845-BD4E-CB4CCA059FC4}" type="datetimeFigureOut">
               <a:rPr lang="en-US" smtClean="0"/>
-              <a:t>4/8/2026</a:t>
+              <a:t>4/9/2026</a:t>
             </a:fld>
             <a:endParaRPr lang="en-US"/>
           </a:p>
@@ -2517,7 +2518,7 @@
           <a:p>
             <a:fld id="{5BCAD085-E8A6-8845-BD4E-CB4CCA059FC4}" type="datetimeFigureOut">
               <a:rPr lang="en-US" smtClean="0"/>
-              <a:t>4/8/2026</a:t>
+              <a:t>4/9/2026</a:t>
             </a:fld>
             <a:endParaRPr lang="en-US"/>
           </a:p>
@@ -2728,7 +2729,7 @@
           <a:p>
             <a:fld id="{5BCAD085-E8A6-8845-BD4E-CB4CCA059FC4}" type="datetimeFigureOut">
               <a:rPr lang="en-US" smtClean="0"/>
-              <a:t>4/8/2026</a:t>
+              <a:t>4/9/2026</a:t>
             </a:fld>
             <a:endParaRPr lang="en-US"/>
           </a:p>
@@ -3346,20 +3347,7 @@
             <a:spAutoFit/>
           </a:bodyPr>
           <a:lstStyle/>
-          <a:p>
-            <a:r>
-              <a:rPr dirty="0"/>
-              <a:t>{{</a:t>
-            </a:r>
-            <a:r>
-              <a:rPr dirty="0" err="1"/>
-              <a:t>INSIGHT:abnormal</a:t>
-            </a:r>
-            <a:r>
-              <a:rPr dirty="0"/>
-              <a:t>}}</a:t>
-            </a:r>
-          </a:p>
+          <a:p/>
         </p:txBody>
       </p:sp>
     </p:spTree>
@@ -3804,96 +3792,190 @@
           </a:p>
         </p:txBody>
       </p:sp>
-      <p:graphicFrame>
-        <p:nvGraphicFramePr>
-          <p:cNvPr id="4" name="表格 3">
+      <p:sp>
+        <p:nvSpPr>
+          <p:cNvPr id="8" name="TextBox 4">
             <a:extLst>
               <a:ext uri="{FF2B5EF4-FFF2-40B4-BE49-F238E27FC236}">
-                <a16:creationId xmlns:a16="http://schemas.microsoft.com/office/drawing/2014/main" id="{E12609E2-21A8-EA49-5410-6F3BD7BCE3B9}"/>
+                <a16:creationId xmlns:a16="http://schemas.microsoft.com/office/drawing/2014/main" id="{38BA3899-CA74-E6FD-4376-3E353B599B76}"/>
               </a:ext>
             </a:extLst>
           </p:cNvPr>
-          <p:cNvGraphicFramePr>
-            <a:graphicFrameLocks noGrp="1"/>
-          </p:cNvGraphicFramePr>
-          <p:nvPr>
-            <p:extLst>
-              <p:ext uri="{D42A27DB-BD31-4B8C-83A1-F6EECF244321}">
-                <p14:modId xmlns:p14="http://schemas.microsoft.com/office/powerpoint/2010/main" val="1065494781"/>
-              </p:ext>
-            </p:extLst>
-          </p:nvPr>
-        </p:nvGraphicFramePr>
-        <p:xfrm>
-          <a:off x="389964" y="1681819"/>
-          <a:ext cx="2631782" cy="365760"/>
-        </p:xfrm>
-        <a:graphic>
-          <a:graphicData uri="http://schemas.openxmlformats.org/drawingml/2006/table">
-            <a:tbl>
-              <a:tblPr/>
-              <a:tblGrid>
-                <a:gridCol w="2631782">
-                  <a:extLst>
-                    <a:ext uri="{9D8B030D-6E8A-4147-A177-3AD203B41FA5}">
-                      <a16:colId xmlns:a16="http://schemas.microsoft.com/office/drawing/2014/main" val="3595657301"/>
-                    </a:ext>
-                  </a:extLst>
-                </a:gridCol>
-              </a:tblGrid>
-              <a:tr h="0">
-                <a:tc>
-                  <a:txBody>
-                    <a:bodyPr/>
-                    <a:lstStyle/>
-                    <a:p>
-                      <a:pPr>
-                        <a:buNone/>
-                      </a:pPr>
-                      <a:r>
-                        <a:rPr lang="en-US" dirty="0"/>
-                        <a:t>{{</a:t>
-                      </a:r>
-                      <a:r>
-                        <a:rPr lang="en-US" dirty="0" err="1"/>
-                        <a:t>INSIGHT:customer_city</a:t>
-                      </a:r>
-                      <a:r>
-                        <a:rPr lang="en-US" dirty="0"/>
-                        <a:t>}}</a:t>
-                      </a:r>
-                    </a:p>
-                  </a:txBody>
-                  <a:tcPr anchor="ctr">
-                    <a:lnL>
-                      <a:noFill/>
-                    </a:lnL>
-                    <a:lnR>
-                      <a:noFill/>
-                    </a:lnR>
-                    <a:lnT>
-                      <a:noFill/>
-                    </a:lnT>
-                    <a:lnB>
-                      <a:noFill/>
-                    </a:lnB>
-                    <a:noFill/>
-                  </a:tcPr>
-                </a:tc>
-                <a:extLst>
-                  <a:ext uri="{0D108BD9-81ED-4DB2-BD59-A6C34878D82A}">
-                    <a16:rowId xmlns:a16="http://schemas.microsoft.com/office/drawing/2014/main" val="1495118108"/>
-                  </a:ext>
-                </a:extLst>
-              </a:tr>
-            </a:tbl>
-          </a:graphicData>
-        </a:graphic>
-      </p:graphicFrame>
+          <p:cNvSpPr txBox="1"/>
+          <p:nvPr/>
+        </p:nvSpPr>
+        <p:spPr>
+          <a:xfrm>
+            <a:off x="1039017" y="1849030"/>
+            <a:ext cx="2623732" cy="369332"/>
+          </a:xfrm>
+          <a:prstGeom prst="rect">
+            <a:avLst/>
+          </a:prstGeom>
+          <a:noFill/>
+        </p:spPr>
+        <p:txBody>
+          <a:bodyPr wrap="none">
+            <a:spAutoFit/>
+          </a:bodyPr>
+          <a:lstStyle/>
+          <a:p>
+            <a:r>
+              <a:rPr lang="en-US" altLang="zh-CN" dirty="0"/>
+              <a:t>{{</a:t>
+            </a:r>
+            <a:r>
+              <a:rPr lang="en-US" altLang="zh-CN" dirty="0" err="1"/>
+              <a:t>INSIGHT:customer_city</a:t>
+            </a:r>
+            <a:r>
+              <a:rPr lang="en-US" altLang="zh-CN" dirty="0"/>
+              <a:t>}}</a:t>
+            </a:r>
+            <a:endParaRPr dirty="0"/>
+          </a:p>
+        </p:txBody>
+      </p:sp>
     </p:spTree>
     <p:extLst>
       <p:ext uri="{BB962C8B-B14F-4D97-AF65-F5344CB8AC3E}">
         <p14:creationId xmlns:p14="http://schemas.microsoft.com/office/powerpoint/2010/main" val="68283920"/>
+      </p:ext>
+    </p:extLst>
+  </p:cSld>
+  <p:clrMapOvr>
+    <a:masterClrMapping/>
+  </p:clrMapOvr>
+</p:sld>
+</file>
+
+<file path=ppt/slides/slide15.xml><?xml version="1.0" encoding="utf-8"?>
+<p:sld xmlns:a="http://schemas.openxmlformats.org/drawingml/2006/main" xmlns:r="http://schemas.openxmlformats.org/officeDocument/2006/relationships" xmlns:p="http://schemas.openxmlformats.org/presentationml/2006/main">
+  <p:cSld>
+    <p:spTree>
+      <p:nvGrpSpPr>
+        <p:cNvPr id="1" name="">
+          <a:extLst>
+            <a:ext uri="{FF2B5EF4-FFF2-40B4-BE49-F238E27FC236}">
+              <a16:creationId xmlns:a16="http://schemas.microsoft.com/office/drawing/2014/main" id="{22EF56E4-8158-2D57-07EC-3B9E815EBCB9}"/>
+            </a:ext>
+          </a:extLst>
+        </p:cNvPr>
+        <p:cNvGrpSpPr/>
+        <p:nvPr/>
+      </p:nvGrpSpPr>
+      <p:grpSpPr>
+        <a:xfrm>
+          <a:off x="0" y="0"/>
+          <a:ext cx="0" cy="0"/>
+          <a:chOff x="0" y="0"/>
+          <a:chExt cx="0" cy="0"/>
+        </a:xfrm>
+      </p:grpSpPr>
+      <p:sp>
+        <p:nvSpPr>
+          <p:cNvPr id="2" name="矩形 1">
+            <a:extLst>
+              <a:ext uri="{FF2B5EF4-FFF2-40B4-BE49-F238E27FC236}">
+                <a16:creationId xmlns:a16="http://schemas.microsoft.com/office/drawing/2014/main" id="{31719BC4-BCF6-5626-55E1-A585248D91C0}"/>
+              </a:ext>
+            </a:extLst>
+          </p:cNvPr>
+          <p:cNvSpPr/>
+          <p:nvPr/>
+        </p:nvSpPr>
+        <p:spPr>
+          <a:xfrm>
+            <a:off x="457200" y="1202267"/>
+            <a:ext cx="6620934" cy="4292600"/>
+          </a:xfrm>
+          <a:prstGeom prst="rect">
+            <a:avLst/>
+          </a:prstGeom>
+        </p:spPr>
+        <p:style>
+          <a:lnRef idx="1">
+            <a:schemeClr val="accent1"/>
+          </a:lnRef>
+          <a:fillRef idx="3">
+            <a:schemeClr val="accent1"/>
+          </a:fillRef>
+          <a:effectRef idx="2">
+            <a:schemeClr val="accent1"/>
+          </a:effectRef>
+          <a:fontRef idx="minor">
+            <a:schemeClr val="lt1"/>
+          </a:fontRef>
+        </p:style>
+        <p:txBody>
+          <a:bodyPr rtlCol="0" anchor="ctr"/>
+          <a:lstStyle/>
+          <a:p>
+            <a:pPr algn="ctr"/>
+            <a:r>
+              <a:rPr lang="en-US" altLang="zh-CN" dirty="0"/>
+              <a:t>[</a:t>
+            </a:r>
+            <a:r>
+              <a:rPr lang="en-US" altLang="zh-CN" dirty="0" err="1"/>
+              <a:t>CHART:age_scatter</a:t>
+            </a:r>
+            <a:r>
+              <a:rPr lang="en-US" altLang="zh-CN" dirty="0"/>
+              <a:t>]</a:t>
+            </a:r>
+            <a:endParaRPr lang="zh-CN" altLang="en-US" dirty="0"/>
+          </a:p>
+        </p:txBody>
+      </p:sp>
+      <p:sp>
+        <p:nvSpPr>
+          <p:cNvPr id="5" name="文本框 4">
+            <a:extLst>
+              <a:ext uri="{FF2B5EF4-FFF2-40B4-BE49-F238E27FC236}">
+                <a16:creationId xmlns:a16="http://schemas.microsoft.com/office/drawing/2014/main" id="{BD9D3181-4D8D-3F3B-C120-06CD2958191F}"/>
+              </a:ext>
+            </a:extLst>
+          </p:cNvPr>
+          <p:cNvSpPr txBox="1"/>
+          <p:nvPr/>
+        </p:nvSpPr>
+        <p:spPr>
+          <a:xfrm>
+            <a:off x="7780866" y="1386933"/>
+            <a:ext cx="3208867" cy="369332"/>
+          </a:xfrm>
+          <a:prstGeom prst="rect">
+            <a:avLst/>
+          </a:prstGeom>
+          <a:noFill/>
+        </p:spPr>
+        <p:txBody>
+          <a:bodyPr wrap="square" rtlCol="0">
+            <a:spAutoFit/>
+          </a:bodyPr>
+          <a:lstStyle/>
+          <a:p>
+            <a:r>
+              <a:rPr lang="en-US" altLang="zh-CN" dirty="0"/>
+              <a:t>{{</a:t>
+            </a:r>
+            <a:r>
+              <a:rPr lang="en-US" altLang="zh-CN" dirty="0" err="1"/>
+              <a:t>INSIGHT:age_scatter</a:t>
+            </a:r>
+            <a:r>
+              <a:rPr lang="en-US" altLang="zh-CN" dirty="0"/>
+              <a:t>}}</a:t>
+            </a:r>
+            <a:endParaRPr lang="zh-CN" altLang="en-US" dirty="0"/>
+          </a:p>
+        </p:txBody>
+      </p:sp>
+    </p:spTree>
+    <p:extLst>
+      <p:ext uri="{BB962C8B-B14F-4D97-AF65-F5344CB8AC3E}">
+        <p14:creationId xmlns:p14="http://schemas.microsoft.com/office/powerpoint/2010/main" val="1006330754"/>
       </p:ext>
     </p:extLst>
   </p:cSld>
@@ -4263,29 +4345,7 @@
             <a:spAutoFit/>
           </a:bodyPr>
           <a:lstStyle/>
-          <a:p>
-            <a:pPr>
-              <a:lnSpc>
-                <a:spcPct val="150000"/>
-              </a:lnSpc>
-              <a:spcAft>
-                <a:spcPts val="1200"/>
-              </a:spcAft>
-              <a:defRPr sz="1400"/>
-            </a:pPr>
-            <a:r>
-              <a:rPr dirty="0"/>
-              <a:t>{{</a:t>
-            </a:r>
-            <a:r>
-              <a:rPr dirty="0" err="1"/>
-              <a:t>INSIGHT:kpi_summary</a:t>
-            </a:r>
-            <a:r>
-              <a:rPr dirty="0"/>
-              <a:t>}}</a:t>
-            </a:r>
-          </a:p>
+          <a:p/>
         </p:txBody>
       </p:sp>
     </p:spTree>
@@ -4432,10 +4492,6 @@
               <a:t>sales_by_person</a:t>
             </a:r>
             <a:r>
-              <a:rPr lang="en-US" altLang="zh-CN" dirty="0"/>
-              <a:t> </a:t>
-            </a:r>
-            <a:r>
               <a:rPr dirty="0"/>
               <a:t>}}</a:t>
             </a:r>
@@ -4926,7 +4982,7 @@
         <p:spPr>
           <a:xfrm>
             <a:off x="457200" y="5212080"/>
-            <a:ext cx="2703561" cy="369332"/>
+            <a:ext cx="9544556" cy="369332"/>
           </a:xfrm>
           <a:prstGeom prst="rect">
             <a:avLst/>
@@ -4934,7 +4990,7 @@
           <a:noFill/>
         </p:spPr>
         <p:txBody>
-          <a:bodyPr wrap="none">
+          <a:bodyPr wrap="square">
             <a:spAutoFit/>
           </a:bodyPr>
           <a:lstStyle/>

--- a/templates/销售分析报告_标准模板.pptx
+++ b/templates/销售分析报告_标准模板.pptx
@@ -316,7 +316,7 @@
           <a:p>
             <a:fld id="{5BCAD085-E8A6-8845-BD4E-CB4CCA059FC4}" type="datetimeFigureOut">
               <a:rPr lang="en-US" smtClean="0"/>
-              <a:t>4/9/2026</a:t>
+              <a:t>4/10/2026</a:t>
             </a:fld>
             <a:endParaRPr lang="en-US"/>
           </a:p>
@@ -484,7 +484,7 @@
           <a:p>
             <a:fld id="{5BCAD085-E8A6-8845-BD4E-CB4CCA059FC4}" type="datetimeFigureOut">
               <a:rPr lang="en-US" smtClean="0"/>
-              <a:t>4/9/2026</a:t>
+              <a:t>4/10/2026</a:t>
             </a:fld>
             <a:endParaRPr lang="en-US"/>
           </a:p>
@@ -662,7 +662,7 @@
           <a:p>
             <a:fld id="{5BCAD085-E8A6-8845-BD4E-CB4CCA059FC4}" type="datetimeFigureOut">
               <a:rPr lang="en-US" smtClean="0"/>
-              <a:t>4/9/2026</a:t>
+              <a:t>4/10/2026</a:t>
             </a:fld>
             <a:endParaRPr lang="en-US"/>
           </a:p>
@@ -830,7 +830,7 @@
           <a:p>
             <a:fld id="{5BCAD085-E8A6-8845-BD4E-CB4CCA059FC4}" type="datetimeFigureOut">
               <a:rPr lang="en-US" smtClean="0"/>
-              <a:t>4/9/2026</a:t>
+              <a:t>4/10/2026</a:t>
             </a:fld>
             <a:endParaRPr lang="en-US"/>
           </a:p>
@@ -1075,7 +1075,7 @@
           <a:p>
             <a:fld id="{5BCAD085-E8A6-8845-BD4E-CB4CCA059FC4}" type="datetimeFigureOut">
               <a:rPr lang="en-US" smtClean="0"/>
-              <a:t>4/9/2026</a:t>
+              <a:t>4/10/2026</a:t>
             </a:fld>
             <a:endParaRPr lang="en-US"/>
           </a:p>
@@ -1360,7 +1360,7 @@
           <a:p>
             <a:fld id="{5BCAD085-E8A6-8845-BD4E-CB4CCA059FC4}" type="datetimeFigureOut">
               <a:rPr lang="en-US" smtClean="0"/>
-              <a:t>4/9/2026</a:t>
+              <a:t>4/10/2026</a:t>
             </a:fld>
             <a:endParaRPr lang="en-US"/>
           </a:p>
@@ -1779,7 +1779,7 @@
           <a:p>
             <a:fld id="{5BCAD085-E8A6-8845-BD4E-CB4CCA059FC4}" type="datetimeFigureOut">
               <a:rPr lang="en-US" smtClean="0"/>
-              <a:t>4/9/2026</a:t>
+              <a:t>4/10/2026</a:t>
             </a:fld>
             <a:endParaRPr lang="en-US"/>
           </a:p>
@@ -1896,7 +1896,7 @@
           <a:p>
             <a:fld id="{5BCAD085-E8A6-8845-BD4E-CB4CCA059FC4}" type="datetimeFigureOut">
               <a:rPr lang="en-US" smtClean="0"/>
-              <a:t>4/9/2026</a:t>
+              <a:t>4/10/2026</a:t>
             </a:fld>
             <a:endParaRPr lang="en-US"/>
           </a:p>
@@ -1991,7 +1991,7 @@
           <a:p>
             <a:fld id="{5BCAD085-E8A6-8845-BD4E-CB4CCA059FC4}" type="datetimeFigureOut">
               <a:rPr lang="en-US" smtClean="0"/>
-              <a:t>4/9/2026</a:t>
+              <a:t>4/10/2026</a:t>
             </a:fld>
             <a:endParaRPr lang="en-US"/>
           </a:p>
@@ -2266,7 +2266,7 @@
           <a:p>
             <a:fld id="{5BCAD085-E8A6-8845-BD4E-CB4CCA059FC4}" type="datetimeFigureOut">
               <a:rPr lang="en-US" smtClean="0"/>
-              <a:t>4/9/2026</a:t>
+              <a:t>4/10/2026</a:t>
             </a:fld>
             <a:endParaRPr lang="en-US"/>
           </a:p>
@@ -2518,7 +2518,7 @@
           <a:p>
             <a:fld id="{5BCAD085-E8A6-8845-BD4E-CB4CCA059FC4}" type="datetimeFigureOut">
               <a:rPr lang="en-US" smtClean="0"/>
-              <a:t>4/9/2026</a:t>
+              <a:t>4/10/2026</a:t>
             </a:fld>
             <a:endParaRPr lang="en-US"/>
           </a:p>
@@ -2729,7 +2729,7 @@
           <a:p>
             <a:fld id="{5BCAD085-E8A6-8845-BD4E-CB4CCA059FC4}" type="datetimeFigureOut">
               <a:rPr lang="en-US" smtClean="0"/>
-              <a:t>4/9/2026</a:t>
+              <a:t>4/10/2026</a:t>
             </a:fld>
             <a:endParaRPr lang="en-US"/>
           </a:p>
@@ -3200,8 +3200,8 @@
         </p:nvSpPr>
         <p:spPr>
           <a:xfrm>
-            <a:off x="457200" y="5943600"/>
-            <a:ext cx="11277295" cy="457200"/>
+            <a:off x="5297488" y="5943600"/>
+            <a:ext cx="1596719" cy="307777"/>
           </a:xfrm>
           <a:prstGeom prst="rect">
             <a:avLst/>
@@ -3222,17 +3222,18 @@
               </a:defRPr>
             </a:pPr>
             <a:r>
-              <a:rPr dirty="0"/>
+              <a:rPr lang="en-US" dirty="0"/>
               <a:t>[</a:t>
             </a:r>
             <a:r>
-              <a:rPr dirty="0" err="1"/>
-              <a:t>TEXT:report_date</a:t>
-            </a:r>
-            <a:r>
-              <a:rPr dirty="0"/>
+              <a:rPr lang="en-US" dirty="0" err="1"/>
+              <a:t>DATE:report_date</a:t>
+            </a:r>
+            <a:r>
+              <a:rPr lang="en-US" dirty="0"/>
               <a:t>]</a:t>
             </a:r>
+            <a:endParaRPr dirty="0"/>
           </a:p>
         </p:txBody>
       </p:sp>
@@ -3347,7 +3348,9 @@
             <a:spAutoFit/>
           </a:bodyPr>
           <a:lstStyle/>
-          <a:p/>
+          <a:p>
+            <a:endParaRPr/>
+          </a:p>
         </p:txBody>
       </p:sp>
     </p:spTree>
@@ -3607,8 +3610,8 @@
         </p:nvSpPr>
         <p:spPr>
           <a:xfrm>
-            <a:off x="457200" y="5943600"/>
-            <a:ext cx="11277295" cy="457200"/>
+            <a:off x="4439444" y="5943600"/>
+            <a:ext cx="3313112" cy="307777"/>
           </a:xfrm>
           <a:prstGeom prst="rect">
             <a:avLst/>
@@ -3616,7 +3619,7 @@
           <a:noFill/>
         </p:spPr>
         <p:txBody>
-          <a:bodyPr wrap="none">
+          <a:bodyPr wrap="square">
             <a:spAutoFit/>
           </a:bodyPr>
           <a:lstStyle/>
@@ -3629,17 +3632,18 @@
               </a:defRPr>
             </a:pPr>
             <a:r>
-              <a:rPr dirty="0"/>
+              <a:rPr lang="en-US" altLang="zh-CN" sz="1400" dirty="0"/>
               <a:t>[</a:t>
             </a:r>
             <a:r>
-              <a:rPr dirty="0" err="1"/>
-              <a:t>TEXT:report_date</a:t>
-            </a:r>
-            <a:r>
-              <a:rPr dirty="0"/>
+              <a:rPr lang="en-US" altLang="zh-CN" sz="1400" dirty="0" err="1"/>
+              <a:t>DATE:report_date</a:t>
+            </a:r>
+            <a:r>
+              <a:rPr lang="en-US" altLang="zh-CN" sz="1400" dirty="0"/>
               <a:t>]</a:t>
             </a:r>
+            <a:endParaRPr dirty="0"/>
           </a:p>
         </p:txBody>
       </p:sp>
@@ -4283,7 +4287,7 @@
         <p:spPr>
           <a:xfrm>
             <a:off x="731520" y="1600200"/>
-            <a:ext cx="4572000" cy="3657600"/>
+            <a:ext cx="4572000" cy="589072"/>
           </a:xfrm>
           <a:prstGeom prst="rect">
             <a:avLst/>
@@ -4296,7 +4300,7 @@
           </a:bodyPr>
           <a:lstStyle/>
           <a:p>
-            <a:pPr algn="l">
+            <a:pPr>
               <a:lnSpc>
                 <a:spcPct val="150000"/>
               </a:lnSpc>
@@ -4314,8 +4318,16 @@
               <a:t>[</a:t>
             </a:r>
             <a:r>
+              <a:rPr lang="en-US" altLang="zh-CN" sz="2400" dirty="0" err="1"/>
+              <a:t>TABLE</a:t>
+            </a:r>
+            <a:r>
               <a:rPr dirty="0" err="1"/>
-              <a:t>KPI:cards</a:t>
+              <a:t>:</a:t>
+            </a:r>
+            <a:r>
+              <a:rPr lang="en-US" altLang="zh-CN" dirty="0" err="1"/>
+              <a:t>kpi_table</a:t>
             </a:r>
             <a:r>
               <a:rPr dirty="0"/>
@@ -4326,14 +4338,20 @@
       </p:sp>
       <p:sp>
         <p:nvSpPr>
-          <p:cNvPr id="5" name="TextBox 4"/>
+          <p:cNvPr id="13" name="文本框 12">
+            <a:extLst>
+              <a:ext uri="{FF2B5EF4-FFF2-40B4-BE49-F238E27FC236}">
+                <a16:creationId xmlns:a16="http://schemas.microsoft.com/office/drawing/2014/main" id="{1D85B51B-EE5D-A1BB-3638-241B28194F0A}"/>
+              </a:ext>
+            </a:extLst>
+          </p:cNvPr>
           <p:cNvSpPr txBox="1"/>
           <p:nvPr/>
         </p:nvSpPr>
         <p:spPr>
           <a:xfrm>
-            <a:off x="731520" y="5237671"/>
-            <a:ext cx="8608012" cy="382092"/>
+            <a:off x="731520" y="4827137"/>
+            <a:ext cx="2647280" cy="369332"/>
           </a:xfrm>
           <a:prstGeom prst="rect">
             <a:avLst/>
@@ -4341,11 +4359,125 @@
           <a:noFill/>
         </p:spPr>
         <p:txBody>
+          <a:bodyPr wrap="square" rtlCol="0">
+            <a:spAutoFit/>
+          </a:bodyPr>
+          <a:lstStyle/>
+          <a:p>
+            <a:r>
+              <a:rPr lang="en-US" altLang="zh-CN" dirty="0"/>
+              <a:t>[</a:t>
+            </a:r>
+            <a:r>
+              <a:rPr lang="en-US" altLang="zh-CN" dirty="0" err="1"/>
+              <a:t>IMAGE:logo</a:t>
+            </a:r>
+            <a:r>
+              <a:rPr lang="en-US" altLang="zh-CN" dirty="0"/>
+              <a:t>]</a:t>
+            </a:r>
+            <a:endParaRPr lang="zh-CN" altLang="en-US" dirty="0"/>
+          </a:p>
+        </p:txBody>
+      </p:sp>
+      <p:sp>
+        <p:nvSpPr>
+          <p:cNvPr id="14" name="文本框 13">
+            <a:extLst>
+              <a:ext uri="{FF2B5EF4-FFF2-40B4-BE49-F238E27FC236}">
+                <a16:creationId xmlns:a16="http://schemas.microsoft.com/office/drawing/2014/main" id="{5C40A54D-8125-C383-7C33-7F397AB9428C}"/>
+              </a:ext>
+            </a:extLst>
+          </p:cNvPr>
+          <p:cNvSpPr txBox="1"/>
+          <p:nvPr/>
+        </p:nvSpPr>
+        <p:spPr>
+          <a:xfrm>
+            <a:off x="4364528" y="4866269"/>
+            <a:ext cx="2307205" cy="369332"/>
+          </a:xfrm>
+          <a:prstGeom prst="rect">
+            <a:avLst/>
+          </a:prstGeom>
+          <a:noFill/>
+        </p:spPr>
+        <p:txBody>
+          <a:bodyPr wrap="square" rtlCol="0">
+            <a:spAutoFit/>
+          </a:bodyPr>
+          <a:lstStyle/>
+          <a:p>
+            <a:r>
+              <a:rPr lang="en-US" altLang="zh-CN" dirty="0"/>
+              <a:t>[</a:t>
+            </a:r>
+            <a:r>
+              <a:rPr lang="en-US" altLang="zh-CN" dirty="0" err="1"/>
+              <a:t>VIDEO:video</a:t>
+            </a:r>
+            <a:r>
+              <a:rPr lang="en-US" altLang="zh-CN" dirty="0"/>
+              <a:t>]</a:t>
+            </a:r>
+            <a:endParaRPr lang="zh-CN" altLang="en-US" dirty="0"/>
+          </a:p>
+        </p:txBody>
+      </p:sp>
+      <p:sp>
+        <p:nvSpPr>
+          <p:cNvPr id="6" name="文本框 5">
+            <a:extLst>
+              <a:ext uri="{FF2B5EF4-FFF2-40B4-BE49-F238E27FC236}">
+                <a16:creationId xmlns:a16="http://schemas.microsoft.com/office/drawing/2014/main" id="{CA652F55-A117-8A70-3DB3-20DAE0D1E3D4}"/>
+              </a:ext>
+            </a:extLst>
+          </p:cNvPr>
+          <p:cNvSpPr txBox="1"/>
+          <p:nvPr/>
+        </p:nvSpPr>
+        <p:spPr>
+          <a:xfrm>
+            <a:off x="3048000" y="3134464"/>
+            <a:ext cx="6096000" cy="589072"/>
+          </a:xfrm>
+          <a:prstGeom prst="rect">
+            <a:avLst/>
+          </a:prstGeom>
+          <a:noFill/>
+        </p:spPr>
+        <p:txBody>
           <a:bodyPr wrap="square">
             <a:spAutoFit/>
           </a:bodyPr>
           <a:lstStyle/>
-          <a:p/>
+          <a:p>
+            <a:pPr>
+              <a:lnSpc>
+                <a:spcPct val="150000"/>
+              </a:lnSpc>
+              <a:spcAft>
+                <a:spcPts val="1200"/>
+              </a:spcAft>
+              <a:defRPr sz="2400">
+                <a:solidFill>
+                  <a:srgbClr val="2C3E50"/>
+                </a:solidFill>
+              </a:defRPr>
+            </a:pPr>
+            <a:r>
+              <a:rPr lang="en-US" altLang="zh-CN" dirty="0"/>
+              <a:t>[</a:t>
+            </a:r>
+            <a:r>
+              <a:rPr lang="en-US" altLang="zh-CN" dirty="0" err="1"/>
+              <a:t>LINK:url</a:t>
+            </a:r>
+            <a:r>
+              <a:rPr lang="en-US" altLang="zh-CN" dirty="0"/>
+              <a:t>]</a:t>
+            </a:r>
+          </a:p>
         </p:txBody>
       </p:sp>
     </p:spTree>

--- a/templates/销售分析报告_标准模板.pptx
+++ b/templates/销售分析报告_标准模板.pptx
@@ -4382,10 +4382,10 @@
       </p:sp>
       <p:sp>
         <p:nvSpPr>
-          <p:cNvPr id="14" name="文本框 13">
+          <p:cNvPr id="3" name="文本框 2">
             <a:extLst>
               <a:ext uri="{FF2B5EF4-FFF2-40B4-BE49-F238E27FC236}">
-                <a16:creationId xmlns:a16="http://schemas.microsoft.com/office/drawing/2014/main" id="{5C40A54D-8125-C383-7C33-7F397AB9428C}"/>
+                <a16:creationId xmlns:a16="http://schemas.microsoft.com/office/drawing/2014/main" id="{2D966EE4-B140-07A6-6C07-1ABFEE3F4EFB}"/>
               </a:ext>
             </a:extLst>
           </p:cNvPr>
@@ -4394,8 +4394,8 @@
         </p:nvSpPr>
         <p:spPr>
           <a:xfrm>
-            <a:off x="4364528" y="4866269"/>
-            <a:ext cx="2307205" cy="369332"/>
+            <a:off x="8016240" y="5247995"/>
+            <a:ext cx="2194560" cy="369332"/>
           </a:xfrm>
           <a:prstGeom prst="rect">
             <a:avLst/>
@@ -4414,69 +4414,13 @@
             </a:r>
             <a:r>
               <a:rPr lang="en-US" altLang="zh-CN" dirty="0" err="1"/>
-              <a:t>VIDEO:video</a:t>
+              <a:t>LINK:url</a:t>
             </a:r>
             <a:r>
               <a:rPr lang="en-US" altLang="zh-CN" dirty="0"/>
               <a:t>]</a:t>
             </a:r>
             <a:endParaRPr lang="zh-CN" altLang="en-US" dirty="0"/>
-          </a:p>
-        </p:txBody>
-      </p:sp>
-      <p:sp>
-        <p:nvSpPr>
-          <p:cNvPr id="6" name="文本框 5">
-            <a:extLst>
-              <a:ext uri="{FF2B5EF4-FFF2-40B4-BE49-F238E27FC236}">
-                <a16:creationId xmlns:a16="http://schemas.microsoft.com/office/drawing/2014/main" id="{CA652F55-A117-8A70-3DB3-20DAE0D1E3D4}"/>
-              </a:ext>
-            </a:extLst>
-          </p:cNvPr>
-          <p:cNvSpPr txBox="1"/>
-          <p:nvPr/>
-        </p:nvSpPr>
-        <p:spPr>
-          <a:xfrm>
-            <a:off x="3048000" y="3134464"/>
-            <a:ext cx="6096000" cy="589072"/>
-          </a:xfrm>
-          <a:prstGeom prst="rect">
-            <a:avLst/>
-          </a:prstGeom>
-          <a:noFill/>
-        </p:spPr>
-        <p:txBody>
-          <a:bodyPr wrap="square">
-            <a:spAutoFit/>
-          </a:bodyPr>
-          <a:lstStyle/>
-          <a:p>
-            <a:pPr>
-              <a:lnSpc>
-                <a:spcPct val="150000"/>
-              </a:lnSpc>
-              <a:spcAft>
-                <a:spcPts val="1200"/>
-              </a:spcAft>
-              <a:defRPr sz="2400">
-                <a:solidFill>
-                  <a:srgbClr val="2C3E50"/>
-                </a:solidFill>
-              </a:defRPr>
-            </a:pPr>
-            <a:r>
-              <a:rPr lang="en-US" altLang="zh-CN" dirty="0"/>
-              <a:t>[</a:t>
-            </a:r>
-            <a:r>
-              <a:rPr lang="en-US" altLang="zh-CN" dirty="0" err="1"/>
-              <a:t>LINK:url</a:t>
-            </a:r>
-            <a:r>
-              <a:rPr lang="en-US" altLang="zh-CN" dirty="0"/>
-              <a:t>]</a:t>
-            </a:r>
           </a:p>
         </p:txBody>
       </p:sp>

--- a/templates/销售分析报告_标准模板.pptx
+++ b/templates/销售分析报告_标准模板.pptx
@@ -4382,32 +4382,44 @@
       </p:sp>
       <p:sp>
         <p:nvSpPr>
-          <p:cNvPr id="3" name="文本框 2">
+          <p:cNvPr id="5" name="矩形 4">
             <a:extLst>
               <a:ext uri="{FF2B5EF4-FFF2-40B4-BE49-F238E27FC236}">
-                <a16:creationId xmlns:a16="http://schemas.microsoft.com/office/drawing/2014/main" id="{2D966EE4-B140-07A6-6C07-1ABFEE3F4EFB}"/>
+                <a16:creationId xmlns:a16="http://schemas.microsoft.com/office/drawing/2014/main" id="{C7601924-7FFB-F65A-3538-FDE1D773B09E}"/>
               </a:ext>
             </a:extLst>
           </p:cNvPr>
-          <p:cNvSpPr txBox="1"/>
+          <p:cNvSpPr/>
           <p:nvPr/>
         </p:nvSpPr>
         <p:spPr>
           <a:xfrm>
-            <a:off x="8016240" y="5247995"/>
-            <a:ext cx="2194560" cy="369332"/>
+            <a:off x="6307667" y="4360333"/>
+            <a:ext cx="2099733" cy="745067"/>
           </a:xfrm>
           <a:prstGeom prst="rect">
             <a:avLst/>
           </a:prstGeom>
-          <a:noFill/>
-        </p:spPr>
-        <p:txBody>
-          <a:bodyPr wrap="square" rtlCol="0">
-            <a:spAutoFit/>
-          </a:bodyPr>
-          <a:lstStyle/>
-          <a:p>
+        </p:spPr>
+        <p:style>
+          <a:lnRef idx="1">
+            <a:schemeClr val="accent1"/>
+          </a:lnRef>
+          <a:fillRef idx="3">
+            <a:schemeClr val="accent1"/>
+          </a:fillRef>
+          <a:effectRef idx="2">
+            <a:schemeClr val="accent1"/>
+          </a:effectRef>
+          <a:fontRef idx="minor">
+            <a:schemeClr val="lt1"/>
+          </a:fontRef>
+        </p:style>
+        <p:txBody>
+          <a:bodyPr rtlCol="0" anchor="ctr"/>
+          <a:lstStyle/>
+          <a:p>
+            <a:pPr algn="ctr"/>
             <a:r>
               <a:rPr lang="en-US" altLang="zh-CN" dirty="0"/>
               <a:t>[</a:t>

--- a/templates/销售分析报告_标准模板.pptx
+++ b/templates/销售分析报告_标准模板.pptx
@@ -4382,51 +4382,39 @@
       </p:sp>
       <p:sp>
         <p:nvSpPr>
-          <p:cNvPr id="5" name="矩形 4">
+          <p:cNvPr id="3" name="文本框 2">
             <a:extLst>
               <a:ext uri="{FF2B5EF4-FFF2-40B4-BE49-F238E27FC236}">
-                <a16:creationId xmlns:a16="http://schemas.microsoft.com/office/drawing/2014/main" id="{C7601924-7FFB-F65A-3538-FDE1D773B09E}"/>
+                <a16:creationId xmlns:a16="http://schemas.microsoft.com/office/drawing/2014/main" id="{B810B29E-29B3-4E4A-6538-4D9C134F3D74}"/>
               </a:ext>
             </a:extLst>
           </p:cNvPr>
-          <p:cNvSpPr/>
+          <p:cNvSpPr txBox="1"/>
           <p:nvPr/>
         </p:nvSpPr>
         <p:spPr>
           <a:xfrm>
-            <a:off x="6307667" y="4360333"/>
-            <a:ext cx="2099733" cy="745067"/>
+            <a:off x="7408333" y="4919134"/>
+            <a:ext cx="1544718" cy="369332"/>
           </a:xfrm>
           <a:prstGeom prst="rect">
             <a:avLst/>
           </a:prstGeom>
-        </p:spPr>
-        <p:style>
-          <a:lnRef idx="1">
-            <a:schemeClr val="accent1"/>
-          </a:lnRef>
-          <a:fillRef idx="3">
-            <a:schemeClr val="accent1"/>
-          </a:fillRef>
-          <a:effectRef idx="2">
-            <a:schemeClr val="accent1"/>
-          </a:effectRef>
-          <a:fontRef idx="minor">
-            <a:schemeClr val="lt1"/>
-          </a:fontRef>
-        </p:style>
-        <p:txBody>
-          <a:bodyPr rtlCol="0" anchor="ctr"/>
-          <a:lstStyle/>
-          <a:p>
-            <a:pPr algn="ctr"/>
+          <a:noFill/>
+        </p:spPr>
+        <p:txBody>
+          <a:bodyPr wrap="none" rtlCol="0">
+            <a:spAutoFit/>
+          </a:bodyPr>
+          <a:lstStyle/>
+          <a:p>
             <a:r>
               <a:rPr lang="en-US" altLang="zh-CN" dirty="0"/>
               <a:t>[</a:t>
             </a:r>
             <a:r>
               <a:rPr lang="en-US" altLang="zh-CN" dirty="0" err="1"/>
-              <a:t>LINK:url</a:t>
+              <a:t>LINK:website</a:t>
             </a:r>
             <a:r>
               <a:rPr lang="en-US" altLang="zh-CN" dirty="0"/>
